--- a/Presentation/Presentation.pptx
+++ b/Presentation/Presentation.pptx
@@ -5517,213 +5517,137 @@
           <a:lstStyle/>
           <a:p>
             <a:r>
-              <a:rPr lang="en-US" sz="2000" dirty="0" err="1"/>
-              <a:t>DistilBERT</a:t>
-            </a:r>
-            <a:r>
               <a:rPr lang="en-US" sz="2000" dirty="0"/>
-              <a:t> errors:</a:t>
+              <a:t>29 false positives</a:t>
             </a:r>
             <a:br>
               <a:rPr lang="en-US" sz="2000" dirty="0"/>
             </a:br>
             <a:r>
               <a:rPr lang="en-US" sz="2000" dirty="0"/>
-              <a:t>29 false positives</a:t>
+              <a:t>11 false negatives</a:t>
+            </a:r>
+          </a:p>
+          <a:p>
+            <a:r>
+              <a:rPr lang="en-US" sz="2000" dirty="0"/>
+              <a:t>High recall came at the cost of incorrectly flagging more human writing.</a:t>
+            </a:r>
+          </a:p>
+        </p:txBody>
+      </p:sp>
+      <p:sp>
+        <p:nvSpPr>
+          <p:cNvPr id="7" name="Rectangle 6">
+            <a:extLst>
+              <a:ext uri="{FF2B5EF4-FFF2-40B4-BE49-F238E27FC236}">
+                <a16:creationId xmlns:a16="http://schemas.microsoft.com/office/drawing/2014/main" id="{FE1813E7-421A-4D8D-A673-EC77EFC4F767}"/>
+              </a:ext>
+            </a:extLst>
+          </p:cNvPr>
+          <p:cNvSpPr>
+            <a:spLocks noGrp="1"/>
+          </p:cNvSpPr>
+          <p:nvPr/>
+        </p:nvSpPr>
+        <p:spPr>
+          <a:xfrm>
+            <a:off x="6743700" y="1714500"/>
+            <a:ext cx="4476750" cy="400050"/>
+          </a:xfrm>
+          <a:prstGeom prst="rect">
+            <a:avLst/>
+          </a:prstGeom>
+          <a:noFill/>
+          <a:ln w="0">
+            <a:noFill/>
+            <a:prstDash val="solid"/>
+          </a:ln>
+        </p:spPr>
+        <p:txBody>
+          <a:bodyPr anchor="ctr"/>
+          <a:lstStyle/>
+          <a:p>
+            <a:pPr>
+              <a:defRPr sz="2025" b="1">
+                <a:solidFill>
+                  <a:srgbClr val="000000"/>
+                </a:solidFill>
+                <a:latin typeface="Arial"/>
+                <a:ea typeface="Arial"/>
+                <a:cs typeface="Arial"/>
+              </a:defRPr>
+            </a:pPr>
+            <a:r>
+              <a:rPr sz="2025" b="1">
+                <a:solidFill>
+                  <a:srgbClr val="000000"/>
+                </a:solidFill>
+                <a:latin typeface="Arial"/>
+                <a:ea typeface="Arial"/>
+                <a:cs typeface="Arial"/>
+              </a:rPr>
+              <a:t>Responsible-use limit</a:t>
+            </a:r>
+          </a:p>
+        </p:txBody>
+      </p:sp>
+      <p:sp>
+        <p:nvSpPr>
+          <p:cNvPr id="8" name="Rectangle 7">
+            <a:extLst>
+              <a:ext uri="{FF2B5EF4-FFF2-40B4-BE49-F238E27FC236}">
+                <a16:creationId xmlns:a16="http://schemas.microsoft.com/office/drawing/2014/main" id="{39277FA5-1689-4422-ACA8-81DDDE49625B}"/>
+              </a:ext>
+            </a:extLst>
+          </p:cNvPr>
+          <p:cNvSpPr>
+            <a:spLocks noGrp="1"/>
+          </p:cNvSpPr>
+          <p:nvPr/>
+        </p:nvSpPr>
+        <p:spPr>
+          <a:xfrm>
+            <a:off x="6743700" y="2333625"/>
+            <a:ext cx="4476750" cy="2381250"/>
+          </a:xfrm>
+          <a:prstGeom prst="rect">
+            <a:avLst/>
+          </a:prstGeom>
+          <a:noFill/>
+          <a:ln w="0">
+            <a:noFill/>
+            <a:prstDash val="solid"/>
+          </a:ln>
+        </p:spPr>
+        <p:txBody>
+          <a:bodyPr anchor="ctr"/>
+          <a:lstStyle/>
+          <a:p>
+            <a:r>
+              <a:rPr lang="en-US" sz="2000" dirty="0"/>
+              <a:t>Never treat a prediction as proof</a:t>
             </a:r>
             <a:br>
               <a:rPr lang="en-US" sz="2000" dirty="0"/>
             </a:br>
             <a:r>
               <a:rPr lang="en-US" sz="2000" dirty="0"/>
-              <a:t>11 false negatives</a:t>
-            </a:r>
-          </a:p>
-          <a:p>
-            <a:r>
-              <a:rPr lang="en-US" sz="2000"/>
-              <a:t>High recall came at the cost of incorrectly flagging more human writing.</a:t>
-            </a:r>
-          </a:p>
-        </p:txBody>
-      </p:sp>
-      <p:sp>
-        <p:nvSpPr>
-          <p:cNvPr id="7" name="Rectangle 6">
-            <a:extLst>
-              <a:ext uri="{FF2B5EF4-FFF2-40B4-BE49-F238E27FC236}">
-                <a16:creationId xmlns:a16="http://schemas.microsoft.com/office/drawing/2014/main" id="{FE1813E7-421A-4D8D-A673-EC77EFC4F767}"/>
-              </a:ext>
-            </a:extLst>
-          </p:cNvPr>
-          <p:cNvSpPr>
-            <a:spLocks noGrp="1"/>
-          </p:cNvSpPr>
-          <p:nvPr/>
-        </p:nvSpPr>
-        <p:spPr>
-          <a:xfrm>
-            <a:off x="6743700" y="1714500"/>
-            <a:ext cx="4476750" cy="400050"/>
-          </a:xfrm>
-          <a:prstGeom prst="rect">
-            <a:avLst/>
-          </a:prstGeom>
-          <a:noFill/>
-          <a:ln w="0">
-            <a:noFill/>
-            <a:prstDash val="solid"/>
-          </a:ln>
-        </p:spPr>
-        <p:txBody>
-          <a:bodyPr anchor="ctr"/>
-          <a:lstStyle/>
-          <a:p>
-            <a:pPr>
-              <a:defRPr sz="2025" b="1">
-                <a:solidFill>
-                  <a:srgbClr val="000000"/>
-                </a:solidFill>
-                <a:latin typeface="Arial"/>
-                <a:ea typeface="Arial"/>
-                <a:cs typeface="Arial"/>
-              </a:defRPr>
-            </a:pPr>
-            <a:r>
-              <a:rPr sz="2025" b="1">
-                <a:solidFill>
-                  <a:srgbClr val="000000"/>
-                </a:solidFill>
-                <a:latin typeface="Arial"/>
-                <a:ea typeface="Arial"/>
-                <a:cs typeface="Arial"/>
-              </a:rPr>
-              <a:t>Responsible-use limit</a:t>
-            </a:r>
-          </a:p>
-        </p:txBody>
-      </p:sp>
-      <p:sp>
-        <p:nvSpPr>
-          <p:cNvPr id="8" name="Rectangle 7">
-            <a:extLst>
-              <a:ext uri="{FF2B5EF4-FFF2-40B4-BE49-F238E27FC236}">
-                <a16:creationId xmlns:a16="http://schemas.microsoft.com/office/drawing/2014/main" id="{39277FA5-1689-4422-ACA8-81DDDE49625B}"/>
-              </a:ext>
-            </a:extLst>
-          </p:cNvPr>
-          <p:cNvSpPr>
-            <a:spLocks noGrp="1"/>
-          </p:cNvSpPr>
-          <p:nvPr/>
-        </p:nvSpPr>
-        <p:spPr>
-          <a:xfrm>
-            <a:off x="6743700" y="2333625"/>
-            <a:ext cx="4476750" cy="2381250"/>
-          </a:xfrm>
-          <a:prstGeom prst="rect">
-            <a:avLst/>
-          </a:prstGeom>
-          <a:noFill/>
-          <a:ln w="0">
-            <a:noFill/>
-            <a:prstDash val="solid"/>
-          </a:ln>
-        </p:spPr>
-        <p:txBody>
-          <a:bodyPr anchor="ctr"/>
-          <a:lstStyle/>
-          <a:p>
-            <a:pPr>
-              <a:defRPr sz="1875" b="0">
-                <a:solidFill>
-                  <a:srgbClr val="000000"/>
-                </a:solidFill>
-                <a:latin typeface="Arial"/>
-                <a:ea typeface="Arial"/>
-                <a:cs typeface="Arial"/>
-              </a:defRPr>
-            </a:pPr>
-            <a:r>
-              <a:rPr sz="1875" b="0" dirty="0">
-                <a:solidFill>
-                  <a:srgbClr val="000000"/>
-                </a:solidFill>
-                <a:latin typeface="Arial"/>
-                <a:ea typeface="Arial"/>
-                <a:cs typeface="Arial"/>
-              </a:rPr>
-              <a:t>Never treat a score as proof</a:t>
-            </a:r>
-          </a:p>
-          <a:p>
-            <a:pPr>
-              <a:defRPr sz="1875" b="0">
-                <a:solidFill>
-                  <a:srgbClr val="000000"/>
-                </a:solidFill>
-                <a:latin typeface="Arial"/>
-                <a:ea typeface="Arial"/>
-                <a:cs typeface="Arial"/>
-              </a:defRPr>
-            </a:pPr>
-            <a:r>
-              <a:rPr sz="1875" b="0" dirty="0">
-                <a:solidFill>
-                  <a:srgbClr val="000000"/>
-                </a:solidFill>
-                <a:latin typeface="Arial"/>
-                <a:ea typeface="Arial"/>
-                <a:cs typeface="Arial"/>
-              </a:rPr>
               <a:t>Require human review and appeal</a:t>
             </a:r>
-          </a:p>
-          <a:p>
-            <a:pPr>
-              <a:defRPr sz="1875" b="0">
-                <a:solidFill>
-                  <a:srgbClr val="000000"/>
-                </a:solidFill>
-                <a:latin typeface="Arial"/>
-                <a:ea typeface="Arial"/>
-                <a:cs typeface="Arial"/>
-              </a:defRPr>
-            </a:pPr>
-            <a:r>
-              <a:rPr sz="1875" b="0" dirty="0">
-                <a:solidFill>
-                  <a:srgbClr val="000000"/>
-                </a:solidFill>
-                <a:latin typeface="Arial"/>
-                <a:ea typeface="Arial"/>
-                <a:cs typeface="Arial"/>
-              </a:rPr>
-              <a:t>Test subgroup performance</a:t>
-            </a:r>
-          </a:p>
-          <a:p>
-            <a:pPr>
-              <a:defRPr sz="1875" b="0">
-                <a:solidFill>
-                  <a:srgbClr val="000000"/>
-                </a:solidFill>
-                <a:latin typeface="Arial"/>
-                <a:ea typeface="Arial"/>
-                <a:cs typeface="Arial"/>
-              </a:defRPr>
-            </a:pPr>
-            <a:r>
-              <a:rPr sz="1875" b="0" dirty="0">
-                <a:solidFill>
-                  <a:srgbClr val="000000"/>
-                </a:solidFill>
-                <a:latin typeface="Arial"/>
-                <a:ea typeface="Arial"/>
-                <a:cs typeface="Arial"/>
-              </a:rPr>
-              <a:t>Expect drift on new generators</a:t>
+            <a:br>
+              <a:rPr lang="en-US" sz="2000" dirty="0"/>
+            </a:br>
+            <a:r>
+              <a:rPr lang="en-US" sz="2000" dirty="0"/>
+              <a:t>Evaluate bias across writer groups</a:t>
+            </a:r>
+            <a:br>
+              <a:rPr lang="en-US" sz="2000" dirty="0"/>
+            </a:br>
+            <a:r>
+              <a:rPr lang="en-US" sz="2000" dirty="0"/>
+              <a:t>Expect errors on unseen AI models</a:t>
             </a:r>
           </a:p>
         </p:txBody>
